--- a/Exercices/S2_06_Graphes/12_coloration_ccinp/images/Figure.pptx
+++ b/Exercices/S2_06_Graphes/12_coloration_ccinp/images/Figure.pptx
@@ -6,6 +6,7 @@
   </p:sldMasterIdLst>
   <p:sldIdLst>
     <p:sldId id="256" r:id="rId2"/>
+    <p:sldId id="257" r:id="rId3"/>
   </p:sldIdLst>
   <p:sldSz cx="12192000" cy="6858000"/>
   <p:notesSz cx="6858000" cy="9144000"/>
@@ -270,7 +271,7 @@
           <a:p>
             <a:fld id="{96989744-DDE4-4C6A-88EC-08074A1DADD4}" type="datetimeFigureOut">
               <a:rPr lang="fr-FR" smtClean="0"/>
-              <a:t>20/04/2026</a:t>
+              <a:t>22/04/2026</a:t>
             </a:fld>
             <a:endParaRPr lang="fr-FR"/>
           </a:p>
@@ -468,7 +469,7 @@
           <a:p>
             <a:fld id="{96989744-DDE4-4C6A-88EC-08074A1DADD4}" type="datetimeFigureOut">
               <a:rPr lang="fr-FR" smtClean="0"/>
-              <a:t>20/04/2026</a:t>
+              <a:t>22/04/2026</a:t>
             </a:fld>
             <a:endParaRPr lang="fr-FR"/>
           </a:p>
@@ -676,7 +677,7 @@
           <a:p>
             <a:fld id="{96989744-DDE4-4C6A-88EC-08074A1DADD4}" type="datetimeFigureOut">
               <a:rPr lang="fr-FR" smtClean="0"/>
-              <a:t>20/04/2026</a:t>
+              <a:t>22/04/2026</a:t>
             </a:fld>
             <a:endParaRPr lang="fr-FR"/>
           </a:p>
@@ -874,7 +875,7 @@
           <a:p>
             <a:fld id="{96989744-DDE4-4C6A-88EC-08074A1DADD4}" type="datetimeFigureOut">
               <a:rPr lang="fr-FR" smtClean="0"/>
-              <a:t>20/04/2026</a:t>
+              <a:t>22/04/2026</a:t>
             </a:fld>
             <a:endParaRPr lang="fr-FR"/>
           </a:p>
@@ -1149,7 +1150,7 @@
           <a:p>
             <a:fld id="{96989744-DDE4-4C6A-88EC-08074A1DADD4}" type="datetimeFigureOut">
               <a:rPr lang="fr-FR" smtClean="0"/>
-              <a:t>20/04/2026</a:t>
+              <a:t>22/04/2026</a:t>
             </a:fld>
             <a:endParaRPr lang="fr-FR"/>
           </a:p>
@@ -1414,7 +1415,7 @@
           <a:p>
             <a:fld id="{96989744-DDE4-4C6A-88EC-08074A1DADD4}" type="datetimeFigureOut">
               <a:rPr lang="fr-FR" smtClean="0"/>
-              <a:t>20/04/2026</a:t>
+              <a:t>22/04/2026</a:t>
             </a:fld>
             <a:endParaRPr lang="fr-FR"/>
           </a:p>
@@ -1826,7 +1827,7 @@
           <a:p>
             <a:fld id="{96989744-DDE4-4C6A-88EC-08074A1DADD4}" type="datetimeFigureOut">
               <a:rPr lang="fr-FR" smtClean="0"/>
-              <a:t>20/04/2026</a:t>
+              <a:t>22/04/2026</a:t>
             </a:fld>
             <a:endParaRPr lang="fr-FR"/>
           </a:p>
@@ -1967,7 +1968,7 @@
           <a:p>
             <a:fld id="{96989744-DDE4-4C6A-88EC-08074A1DADD4}" type="datetimeFigureOut">
               <a:rPr lang="fr-FR" smtClean="0"/>
-              <a:t>20/04/2026</a:t>
+              <a:t>22/04/2026</a:t>
             </a:fld>
             <a:endParaRPr lang="fr-FR"/>
           </a:p>
@@ -2080,7 +2081,7 @@
           <a:p>
             <a:fld id="{96989744-DDE4-4C6A-88EC-08074A1DADD4}" type="datetimeFigureOut">
               <a:rPr lang="fr-FR" smtClean="0"/>
-              <a:t>20/04/2026</a:t>
+              <a:t>22/04/2026</a:t>
             </a:fld>
             <a:endParaRPr lang="fr-FR"/>
           </a:p>
@@ -2391,7 +2392,7 @@
           <a:p>
             <a:fld id="{96989744-DDE4-4C6A-88EC-08074A1DADD4}" type="datetimeFigureOut">
               <a:rPr lang="fr-FR" smtClean="0"/>
-              <a:t>20/04/2026</a:t>
+              <a:t>22/04/2026</a:t>
             </a:fld>
             <a:endParaRPr lang="fr-FR"/>
           </a:p>
@@ -2679,7 +2680,7 @@
           <a:p>
             <a:fld id="{96989744-DDE4-4C6A-88EC-08074A1DADD4}" type="datetimeFigureOut">
               <a:rPr lang="fr-FR" smtClean="0"/>
-              <a:t>20/04/2026</a:t>
+              <a:t>22/04/2026</a:t>
             </a:fld>
             <a:endParaRPr lang="fr-FR"/>
           </a:p>
@@ -2920,7 +2921,7 @@
           <a:p>
             <a:fld id="{96989744-DDE4-4C6A-88EC-08074A1DADD4}" type="datetimeFigureOut">
               <a:rPr lang="fr-FR" smtClean="0"/>
-              <a:t>20/04/2026</a:t>
+              <a:t>22/04/2026</a:t>
             </a:fld>
             <a:endParaRPr lang="fr-FR"/>
           </a:p>
@@ -5432,6 +5433,2114 @@
 </p:sld>
 </file>
 
+<file path=ppt/slides/slide2.xml><?xml version="1.0" encoding="utf-8"?>
+<p:sld xmlns:a="http://schemas.openxmlformats.org/drawingml/2006/main" xmlns:r="http://schemas.openxmlformats.org/officeDocument/2006/relationships" xmlns:p="http://schemas.openxmlformats.org/presentationml/2006/main">
+  <p:cSld>
+    <p:spTree>
+      <p:nvGrpSpPr>
+        <p:cNvPr id="1" name="">
+          <a:extLst>
+            <a:ext uri="{FF2B5EF4-FFF2-40B4-BE49-F238E27FC236}">
+              <a16:creationId xmlns:a16="http://schemas.microsoft.com/office/drawing/2014/main" id="{E1A9E93C-44DF-A4D5-B3DB-B7EF2189BE4C}"/>
+            </a:ext>
+          </a:extLst>
+        </p:cNvPr>
+        <p:cNvGrpSpPr/>
+        <p:nvPr/>
+      </p:nvGrpSpPr>
+      <p:grpSpPr>
+        <a:xfrm>
+          <a:off x="0" y="0"/>
+          <a:ext cx="0" cy="0"/>
+          <a:chOff x="0" y="0"/>
+          <a:chExt cx="0" cy="0"/>
+        </a:xfrm>
+      </p:grpSpPr>
+      <p:pic>
+        <p:nvPicPr>
+          <p:cNvPr id="5" name="Image 4">
+            <a:extLst>
+              <a:ext uri="{FF2B5EF4-FFF2-40B4-BE49-F238E27FC236}">
+                <a16:creationId xmlns:a16="http://schemas.microsoft.com/office/drawing/2014/main" id="{4CC4D623-EA9A-AFE0-FAD8-54AD23FB8165}"/>
+              </a:ext>
+            </a:extLst>
+          </p:cNvPr>
+          <p:cNvPicPr>
+            <a:picLocks noChangeAspect="1"/>
+          </p:cNvPicPr>
+          <p:nvPr/>
+        </p:nvPicPr>
+        <p:blipFill>
+          <a:blip r:embed="rId2">
+            <a:extLst>
+              <a:ext uri="{28A0092B-C50C-407E-A947-70E740481C1C}">
+                <a14:useLocalDpi xmlns:a14="http://schemas.microsoft.com/office/drawing/2010/main" val="0"/>
+              </a:ext>
+            </a:extLst>
+          </a:blip>
+          <a:stretch>
+            <a:fillRect/>
+          </a:stretch>
+        </p:blipFill>
+        <p:spPr>
+          <a:xfrm>
+            <a:off x="982464" y="1896869"/>
+            <a:ext cx="2511557" cy="1618491"/>
+          </a:xfrm>
+          <a:prstGeom prst="rect">
+            <a:avLst/>
+          </a:prstGeom>
+        </p:spPr>
+      </p:pic>
+      <p:sp>
+        <p:nvSpPr>
+          <p:cNvPr id="6" name="Ellipse 5">
+            <a:extLst>
+              <a:ext uri="{FF2B5EF4-FFF2-40B4-BE49-F238E27FC236}">
+                <a16:creationId xmlns:a16="http://schemas.microsoft.com/office/drawing/2014/main" id="{65FA54C2-8029-E50D-2EBF-EFF3E9AC1ADF}"/>
+              </a:ext>
+            </a:extLst>
+          </p:cNvPr>
+          <p:cNvSpPr/>
+          <p:nvPr/>
+        </p:nvSpPr>
+        <p:spPr>
+          <a:xfrm>
+            <a:off x="4114800" y="2627375"/>
+            <a:ext cx="264160" cy="264160"/>
+          </a:xfrm>
+          <a:prstGeom prst="ellipse">
+            <a:avLst/>
+          </a:prstGeom>
+          <a:solidFill>
+            <a:srgbClr val="FFFF00"/>
+          </a:solidFill>
+          <a:ln>
+            <a:solidFill>
+              <a:srgbClr val="FFC000"/>
+            </a:solidFill>
+          </a:ln>
+        </p:spPr>
+        <p:style>
+          <a:lnRef idx="2">
+            <a:schemeClr val="accent1">
+              <a:shade val="15000"/>
+            </a:schemeClr>
+          </a:lnRef>
+          <a:fillRef idx="1">
+            <a:schemeClr val="accent1"/>
+          </a:fillRef>
+          <a:effectRef idx="0">
+            <a:schemeClr val="accent1"/>
+          </a:effectRef>
+          <a:fontRef idx="minor">
+            <a:schemeClr val="lt1"/>
+          </a:fontRef>
+        </p:style>
+        <p:txBody>
+          <a:bodyPr rtlCol="0" anchor="ctr"/>
+          <a:lstStyle/>
+          <a:p>
+            <a:pPr algn="ctr"/>
+            <a:r>
+              <a:rPr lang="fr-FR" sz="1200" b="1" dirty="0">
+                <a:solidFill>
+                  <a:sysClr val="windowText" lastClr="000000"/>
+                </a:solidFill>
+              </a:rPr>
+              <a:t>A</a:t>
+            </a:r>
+          </a:p>
+        </p:txBody>
+      </p:sp>
+      <p:sp>
+        <p:nvSpPr>
+          <p:cNvPr id="7" name="Ellipse 6">
+            <a:extLst>
+              <a:ext uri="{FF2B5EF4-FFF2-40B4-BE49-F238E27FC236}">
+                <a16:creationId xmlns:a16="http://schemas.microsoft.com/office/drawing/2014/main" id="{DE1C6EAC-D144-E600-4FD8-D18BA5A0D9A8}"/>
+              </a:ext>
+            </a:extLst>
+          </p:cNvPr>
+          <p:cNvSpPr/>
+          <p:nvPr/>
+        </p:nvSpPr>
+        <p:spPr>
+          <a:xfrm>
+            <a:off x="4683760" y="2627375"/>
+            <a:ext cx="264160" cy="264160"/>
+          </a:xfrm>
+          <a:prstGeom prst="ellipse">
+            <a:avLst/>
+          </a:prstGeom>
+          <a:solidFill>
+            <a:srgbClr val="FFBDBD"/>
+          </a:solidFill>
+          <a:ln>
+            <a:solidFill>
+              <a:srgbClr val="FF0000"/>
+            </a:solidFill>
+          </a:ln>
+        </p:spPr>
+        <p:style>
+          <a:lnRef idx="2">
+            <a:schemeClr val="accent1">
+              <a:shade val="15000"/>
+            </a:schemeClr>
+          </a:lnRef>
+          <a:fillRef idx="1">
+            <a:schemeClr val="accent1"/>
+          </a:fillRef>
+          <a:effectRef idx="0">
+            <a:schemeClr val="accent1"/>
+          </a:effectRef>
+          <a:fontRef idx="minor">
+            <a:schemeClr val="lt1"/>
+          </a:fontRef>
+        </p:style>
+        <p:txBody>
+          <a:bodyPr rtlCol="0" anchor="ctr"/>
+          <a:lstStyle/>
+          <a:p>
+            <a:pPr algn="ctr"/>
+            <a:r>
+              <a:rPr lang="fr-FR" sz="1200" b="1" dirty="0">
+                <a:solidFill>
+                  <a:sysClr val="windowText" lastClr="000000"/>
+                </a:solidFill>
+              </a:rPr>
+              <a:t>B</a:t>
+            </a:r>
+          </a:p>
+        </p:txBody>
+      </p:sp>
+      <p:cxnSp>
+        <p:nvCxnSpPr>
+          <p:cNvPr id="9" name="Connecteur droit 8">
+            <a:extLst>
+              <a:ext uri="{FF2B5EF4-FFF2-40B4-BE49-F238E27FC236}">
+                <a16:creationId xmlns:a16="http://schemas.microsoft.com/office/drawing/2014/main" id="{37FAEC63-3860-1FA6-E0FC-5926BBA83824}"/>
+              </a:ext>
+            </a:extLst>
+          </p:cNvPr>
+          <p:cNvCxnSpPr>
+            <a:stCxn id="6" idx="6"/>
+            <a:endCxn id="7" idx="2"/>
+          </p:cNvCxnSpPr>
+          <p:nvPr/>
+        </p:nvCxnSpPr>
+        <p:spPr>
+          <a:xfrm>
+            <a:off x="4378960" y="2759455"/>
+            <a:ext cx="304800" cy="0"/>
+          </a:xfrm>
+          <a:prstGeom prst="line">
+            <a:avLst/>
+          </a:prstGeom>
+          <a:ln>
+            <a:solidFill>
+              <a:schemeClr val="tx1"/>
+            </a:solidFill>
+          </a:ln>
+        </p:spPr>
+        <p:style>
+          <a:lnRef idx="2">
+            <a:schemeClr val="accent1"/>
+          </a:lnRef>
+          <a:fillRef idx="0">
+            <a:schemeClr val="accent1"/>
+          </a:fillRef>
+          <a:effectRef idx="1">
+            <a:schemeClr val="accent1"/>
+          </a:effectRef>
+          <a:fontRef idx="minor">
+            <a:schemeClr val="tx1"/>
+          </a:fontRef>
+        </p:style>
+      </p:cxnSp>
+      <p:sp>
+        <p:nvSpPr>
+          <p:cNvPr id="10" name="Ellipse 9">
+            <a:extLst>
+              <a:ext uri="{FF2B5EF4-FFF2-40B4-BE49-F238E27FC236}">
+                <a16:creationId xmlns:a16="http://schemas.microsoft.com/office/drawing/2014/main" id="{EEC5B5C7-F496-C842-C1E9-46EFF2378A29}"/>
+              </a:ext>
+            </a:extLst>
+          </p:cNvPr>
+          <p:cNvSpPr/>
+          <p:nvPr/>
+        </p:nvSpPr>
+        <p:spPr>
+          <a:xfrm>
+            <a:off x="4683760" y="2089910"/>
+            <a:ext cx="264160" cy="264160"/>
+          </a:xfrm>
+          <a:prstGeom prst="ellipse">
+            <a:avLst/>
+          </a:prstGeom>
+          <a:solidFill>
+            <a:schemeClr val="accent4">
+              <a:lumMod val="20000"/>
+              <a:lumOff val="80000"/>
+            </a:schemeClr>
+          </a:solidFill>
+          <a:ln>
+            <a:solidFill>
+              <a:srgbClr val="002060"/>
+            </a:solidFill>
+          </a:ln>
+        </p:spPr>
+        <p:style>
+          <a:lnRef idx="2">
+            <a:schemeClr val="accent1">
+              <a:shade val="15000"/>
+            </a:schemeClr>
+          </a:lnRef>
+          <a:fillRef idx="1">
+            <a:schemeClr val="accent1"/>
+          </a:fillRef>
+          <a:effectRef idx="0">
+            <a:schemeClr val="accent1"/>
+          </a:effectRef>
+          <a:fontRef idx="minor">
+            <a:schemeClr val="lt1"/>
+          </a:fontRef>
+        </p:style>
+        <p:txBody>
+          <a:bodyPr rtlCol="0" anchor="ctr"/>
+          <a:lstStyle/>
+          <a:p>
+            <a:pPr algn="ctr"/>
+            <a:r>
+              <a:rPr lang="fr-FR" sz="1200" b="1" dirty="0">
+                <a:solidFill>
+                  <a:sysClr val="windowText" lastClr="000000"/>
+                </a:solidFill>
+              </a:rPr>
+              <a:t>C</a:t>
+            </a:r>
+          </a:p>
+        </p:txBody>
+      </p:sp>
+      <p:cxnSp>
+        <p:nvCxnSpPr>
+          <p:cNvPr id="11" name="Connecteur droit 10">
+            <a:extLst>
+              <a:ext uri="{FF2B5EF4-FFF2-40B4-BE49-F238E27FC236}">
+                <a16:creationId xmlns:a16="http://schemas.microsoft.com/office/drawing/2014/main" id="{9C1984A0-072F-307C-A130-332A2E71DC36}"/>
+              </a:ext>
+            </a:extLst>
+          </p:cNvPr>
+          <p:cNvCxnSpPr>
+            <a:cxnSpLocks/>
+            <a:stCxn id="10" idx="4"/>
+            <a:endCxn id="7" idx="0"/>
+          </p:cNvCxnSpPr>
+          <p:nvPr/>
+        </p:nvCxnSpPr>
+        <p:spPr>
+          <a:xfrm>
+            <a:off x="4815840" y="2354070"/>
+            <a:ext cx="0" cy="273305"/>
+          </a:xfrm>
+          <a:prstGeom prst="line">
+            <a:avLst/>
+          </a:prstGeom>
+          <a:ln>
+            <a:solidFill>
+              <a:schemeClr val="tx1"/>
+            </a:solidFill>
+          </a:ln>
+        </p:spPr>
+        <p:style>
+          <a:lnRef idx="2">
+            <a:schemeClr val="accent1"/>
+          </a:lnRef>
+          <a:fillRef idx="0">
+            <a:schemeClr val="accent1"/>
+          </a:fillRef>
+          <a:effectRef idx="1">
+            <a:schemeClr val="accent1"/>
+          </a:effectRef>
+          <a:fontRef idx="minor">
+            <a:schemeClr val="tx1"/>
+          </a:fontRef>
+        </p:style>
+      </p:cxnSp>
+      <p:sp>
+        <p:nvSpPr>
+          <p:cNvPr id="14" name="Ellipse 13">
+            <a:extLst>
+              <a:ext uri="{FF2B5EF4-FFF2-40B4-BE49-F238E27FC236}">
+                <a16:creationId xmlns:a16="http://schemas.microsoft.com/office/drawing/2014/main" id="{AE444DB7-DF8D-C78F-FD19-ECA2912100A9}"/>
+              </a:ext>
+            </a:extLst>
+          </p:cNvPr>
+          <p:cNvSpPr/>
+          <p:nvPr/>
+        </p:nvSpPr>
+        <p:spPr>
+          <a:xfrm>
+            <a:off x="4114800" y="2089910"/>
+            <a:ext cx="264160" cy="264160"/>
+          </a:xfrm>
+          <a:prstGeom prst="ellipse">
+            <a:avLst/>
+          </a:prstGeom>
+          <a:solidFill>
+            <a:schemeClr val="accent3">
+              <a:lumMod val="20000"/>
+              <a:lumOff val="80000"/>
+            </a:schemeClr>
+          </a:solidFill>
+          <a:ln>
+            <a:solidFill>
+              <a:schemeClr val="accent6">
+                <a:lumMod val="50000"/>
+              </a:schemeClr>
+            </a:solidFill>
+          </a:ln>
+        </p:spPr>
+        <p:style>
+          <a:lnRef idx="2">
+            <a:schemeClr val="accent1">
+              <a:shade val="15000"/>
+            </a:schemeClr>
+          </a:lnRef>
+          <a:fillRef idx="1">
+            <a:schemeClr val="accent1"/>
+          </a:fillRef>
+          <a:effectRef idx="0">
+            <a:schemeClr val="accent1"/>
+          </a:effectRef>
+          <a:fontRef idx="minor">
+            <a:schemeClr val="lt1"/>
+          </a:fontRef>
+        </p:style>
+        <p:txBody>
+          <a:bodyPr rtlCol="0" anchor="ctr"/>
+          <a:lstStyle/>
+          <a:p>
+            <a:pPr algn="ctr"/>
+            <a:r>
+              <a:rPr lang="fr-FR" sz="1200" b="1" dirty="0">
+                <a:solidFill>
+                  <a:sysClr val="windowText" lastClr="000000"/>
+                </a:solidFill>
+              </a:rPr>
+              <a:t>D</a:t>
+            </a:r>
+          </a:p>
+        </p:txBody>
+      </p:sp>
+      <p:cxnSp>
+        <p:nvCxnSpPr>
+          <p:cNvPr id="15" name="Connecteur droit 14">
+            <a:extLst>
+              <a:ext uri="{FF2B5EF4-FFF2-40B4-BE49-F238E27FC236}">
+                <a16:creationId xmlns:a16="http://schemas.microsoft.com/office/drawing/2014/main" id="{11D918F0-4C45-EDC7-A4C5-9094566715EC}"/>
+              </a:ext>
+            </a:extLst>
+          </p:cNvPr>
+          <p:cNvCxnSpPr>
+            <a:cxnSpLocks/>
+            <a:stCxn id="14" idx="6"/>
+            <a:endCxn id="10" idx="2"/>
+          </p:cNvCxnSpPr>
+          <p:nvPr/>
+        </p:nvCxnSpPr>
+        <p:spPr>
+          <a:xfrm>
+            <a:off x="4378960" y="2221990"/>
+            <a:ext cx="304800" cy="0"/>
+          </a:xfrm>
+          <a:prstGeom prst="line">
+            <a:avLst/>
+          </a:prstGeom>
+          <a:ln>
+            <a:solidFill>
+              <a:schemeClr val="tx1"/>
+            </a:solidFill>
+          </a:ln>
+        </p:spPr>
+        <p:style>
+          <a:lnRef idx="2">
+            <a:schemeClr val="accent1"/>
+          </a:lnRef>
+          <a:fillRef idx="0">
+            <a:schemeClr val="accent1"/>
+          </a:fillRef>
+          <a:effectRef idx="1">
+            <a:schemeClr val="accent1"/>
+          </a:effectRef>
+          <a:fontRef idx="minor">
+            <a:schemeClr val="tx1"/>
+          </a:fontRef>
+        </p:style>
+      </p:cxnSp>
+      <p:cxnSp>
+        <p:nvCxnSpPr>
+          <p:cNvPr id="22" name="Connecteur droit 21">
+            <a:extLst>
+              <a:ext uri="{FF2B5EF4-FFF2-40B4-BE49-F238E27FC236}">
+                <a16:creationId xmlns:a16="http://schemas.microsoft.com/office/drawing/2014/main" id="{5E214157-6708-D969-7167-2F9214AB4AC9}"/>
+              </a:ext>
+            </a:extLst>
+          </p:cNvPr>
+          <p:cNvCxnSpPr>
+            <a:cxnSpLocks/>
+            <a:stCxn id="14" idx="4"/>
+            <a:endCxn id="6" idx="0"/>
+          </p:cNvCxnSpPr>
+          <p:nvPr/>
+        </p:nvCxnSpPr>
+        <p:spPr>
+          <a:xfrm>
+            <a:off x="4246880" y="2354070"/>
+            <a:ext cx="0" cy="273305"/>
+          </a:xfrm>
+          <a:prstGeom prst="line">
+            <a:avLst/>
+          </a:prstGeom>
+          <a:ln>
+            <a:solidFill>
+              <a:schemeClr val="tx1"/>
+            </a:solidFill>
+          </a:ln>
+        </p:spPr>
+        <p:style>
+          <a:lnRef idx="2">
+            <a:schemeClr val="accent1"/>
+          </a:lnRef>
+          <a:fillRef idx="0">
+            <a:schemeClr val="accent1"/>
+          </a:fillRef>
+          <a:effectRef idx="1">
+            <a:schemeClr val="accent1"/>
+          </a:effectRef>
+          <a:fontRef idx="minor">
+            <a:schemeClr val="tx1"/>
+          </a:fontRef>
+        </p:style>
+      </p:cxnSp>
+      <p:sp>
+        <p:nvSpPr>
+          <p:cNvPr id="25" name="Ellipse 24">
+            <a:extLst>
+              <a:ext uri="{FF2B5EF4-FFF2-40B4-BE49-F238E27FC236}">
+                <a16:creationId xmlns:a16="http://schemas.microsoft.com/office/drawing/2014/main" id="{0FD56393-6E02-D412-DB30-12962B4F2F56}"/>
+              </a:ext>
+            </a:extLst>
+          </p:cNvPr>
+          <p:cNvSpPr/>
+          <p:nvPr/>
+        </p:nvSpPr>
+        <p:spPr>
+          <a:xfrm>
+            <a:off x="4683760" y="3164840"/>
+            <a:ext cx="264160" cy="264160"/>
+          </a:xfrm>
+          <a:prstGeom prst="ellipse">
+            <a:avLst/>
+          </a:prstGeom>
+          <a:solidFill>
+            <a:schemeClr val="accent2">
+              <a:lumMod val="20000"/>
+              <a:lumOff val="80000"/>
+            </a:schemeClr>
+          </a:solidFill>
+          <a:ln>
+            <a:solidFill>
+              <a:schemeClr val="accent2"/>
+            </a:solidFill>
+          </a:ln>
+        </p:spPr>
+        <p:style>
+          <a:lnRef idx="2">
+            <a:schemeClr val="accent1">
+              <a:shade val="15000"/>
+            </a:schemeClr>
+          </a:lnRef>
+          <a:fillRef idx="1">
+            <a:schemeClr val="accent1"/>
+          </a:fillRef>
+          <a:effectRef idx="0">
+            <a:schemeClr val="accent1"/>
+          </a:effectRef>
+          <a:fontRef idx="minor">
+            <a:schemeClr val="lt1"/>
+          </a:fontRef>
+        </p:style>
+        <p:txBody>
+          <a:bodyPr rtlCol="0" anchor="ctr"/>
+          <a:lstStyle/>
+          <a:p>
+            <a:pPr algn="ctr"/>
+            <a:r>
+              <a:rPr lang="fr-FR" sz="1200" b="1" dirty="0">
+                <a:solidFill>
+                  <a:sysClr val="windowText" lastClr="000000"/>
+                </a:solidFill>
+              </a:rPr>
+              <a:t>E</a:t>
+            </a:r>
+          </a:p>
+        </p:txBody>
+      </p:sp>
+      <p:sp>
+        <p:nvSpPr>
+          <p:cNvPr id="27" name="Ellipse 26">
+            <a:extLst>
+              <a:ext uri="{FF2B5EF4-FFF2-40B4-BE49-F238E27FC236}">
+                <a16:creationId xmlns:a16="http://schemas.microsoft.com/office/drawing/2014/main" id="{274BFC6B-45CE-B873-0F77-589FC26A1316}"/>
+              </a:ext>
+            </a:extLst>
+          </p:cNvPr>
+          <p:cNvSpPr/>
+          <p:nvPr/>
+        </p:nvSpPr>
+        <p:spPr>
+          <a:xfrm>
+            <a:off x="4114800" y="3164840"/>
+            <a:ext cx="264160" cy="264160"/>
+          </a:xfrm>
+          <a:prstGeom prst="ellipse">
+            <a:avLst/>
+          </a:prstGeom>
+          <a:solidFill>
+            <a:schemeClr val="accent5">
+              <a:lumMod val="20000"/>
+              <a:lumOff val="80000"/>
+            </a:schemeClr>
+          </a:solidFill>
+          <a:ln>
+            <a:solidFill>
+              <a:schemeClr val="accent5">
+                <a:lumMod val="75000"/>
+              </a:schemeClr>
+            </a:solidFill>
+          </a:ln>
+        </p:spPr>
+        <p:style>
+          <a:lnRef idx="2">
+            <a:schemeClr val="accent1">
+              <a:shade val="15000"/>
+            </a:schemeClr>
+          </a:lnRef>
+          <a:fillRef idx="1">
+            <a:schemeClr val="accent1"/>
+          </a:fillRef>
+          <a:effectRef idx="0">
+            <a:schemeClr val="accent1"/>
+          </a:effectRef>
+          <a:fontRef idx="minor">
+            <a:schemeClr val="lt1"/>
+          </a:fontRef>
+        </p:style>
+        <p:txBody>
+          <a:bodyPr rtlCol="0" anchor="ctr"/>
+          <a:lstStyle/>
+          <a:p>
+            <a:pPr algn="ctr"/>
+            <a:r>
+              <a:rPr lang="fr-FR" sz="1200" b="1" dirty="0">
+                <a:solidFill>
+                  <a:sysClr val="windowText" lastClr="000000"/>
+                </a:solidFill>
+              </a:rPr>
+              <a:t>F</a:t>
+            </a:r>
+          </a:p>
+        </p:txBody>
+      </p:sp>
+      <p:cxnSp>
+        <p:nvCxnSpPr>
+          <p:cNvPr id="28" name="Connecteur droit 27">
+            <a:extLst>
+              <a:ext uri="{FF2B5EF4-FFF2-40B4-BE49-F238E27FC236}">
+                <a16:creationId xmlns:a16="http://schemas.microsoft.com/office/drawing/2014/main" id="{F6F10D64-80F1-FC39-14DB-20FF252AE07B}"/>
+              </a:ext>
+            </a:extLst>
+          </p:cNvPr>
+          <p:cNvCxnSpPr>
+            <a:cxnSpLocks/>
+            <a:stCxn id="27" idx="6"/>
+            <a:endCxn id="25" idx="2"/>
+          </p:cNvCxnSpPr>
+          <p:nvPr/>
+        </p:nvCxnSpPr>
+        <p:spPr>
+          <a:xfrm>
+            <a:off x="4378960" y="3296920"/>
+            <a:ext cx="304800" cy="0"/>
+          </a:xfrm>
+          <a:prstGeom prst="line">
+            <a:avLst/>
+          </a:prstGeom>
+          <a:ln>
+            <a:solidFill>
+              <a:schemeClr val="tx1"/>
+            </a:solidFill>
+          </a:ln>
+        </p:spPr>
+        <p:style>
+          <a:lnRef idx="2">
+            <a:schemeClr val="accent1"/>
+          </a:lnRef>
+          <a:fillRef idx="0">
+            <a:schemeClr val="accent1"/>
+          </a:fillRef>
+          <a:effectRef idx="1">
+            <a:schemeClr val="accent1"/>
+          </a:effectRef>
+          <a:fontRef idx="minor">
+            <a:schemeClr val="tx1"/>
+          </a:fontRef>
+        </p:style>
+      </p:cxnSp>
+      <p:cxnSp>
+        <p:nvCxnSpPr>
+          <p:cNvPr id="30" name="Connecteur droit 29">
+            <a:extLst>
+              <a:ext uri="{FF2B5EF4-FFF2-40B4-BE49-F238E27FC236}">
+                <a16:creationId xmlns:a16="http://schemas.microsoft.com/office/drawing/2014/main" id="{850C06B9-44F1-DB84-FA2D-90478ADD31F5}"/>
+              </a:ext>
+            </a:extLst>
+          </p:cNvPr>
+          <p:cNvCxnSpPr>
+            <a:cxnSpLocks/>
+            <a:stCxn id="6" idx="4"/>
+            <a:endCxn id="27" idx="0"/>
+          </p:cNvCxnSpPr>
+          <p:nvPr/>
+        </p:nvCxnSpPr>
+        <p:spPr>
+          <a:xfrm>
+            <a:off x="4246880" y="2891535"/>
+            <a:ext cx="0" cy="273305"/>
+          </a:xfrm>
+          <a:prstGeom prst="line">
+            <a:avLst/>
+          </a:prstGeom>
+          <a:ln>
+            <a:solidFill>
+              <a:schemeClr val="tx1"/>
+            </a:solidFill>
+          </a:ln>
+        </p:spPr>
+        <p:style>
+          <a:lnRef idx="2">
+            <a:schemeClr val="accent1"/>
+          </a:lnRef>
+          <a:fillRef idx="0">
+            <a:schemeClr val="accent1"/>
+          </a:fillRef>
+          <a:effectRef idx="1">
+            <a:schemeClr val="accent1"/>
+          </a:effectRef>
+          <a:fontRef idx="minor">
+            <a:schemeClr val="tx1"/>
+          </a:fontRef>
+        </p:style>
+      </p:cxnSp>
+      <p:cxnSp>
+        <p:nvCxnSpPr>
+          <p:cNvPr id="33" name="Connecteur droit 32">
+            <a:extLst>
+              <a:ext uri="{FF2B5EF4-FFF2-40B4-BE49-F238E27FC236}">
+                <a16:creationId xmlns:a16="http://schemas.microsoft.com/office/drawing/2014/main" id="{C8F4FB4F-E29F-DE14-E1B4-9BEE73A74711}"/>
+              </a:ext>
+            </a:extLst>
+          </p:cNvPr>
+          <p:cNvCxnSpPr>
+            <a:cxnSpLocks/>
+            <a:stCxn id="7" idx="4"/>
+            <a:endCxn id="25" idx="0"/>
+          </p:cNvCxnSpPr>
+          <p:nvPr/>
+        </p:nvCxnSpPr>
+        <p:spPr>
+          <a:xfrm>
+            <a:off x="4815840" y="2891535"/>
+            <a:ext cx="0" cy="273305"/>
+          </a:xfrm>
+          <a:prstGeom prst="line">
+            <a:avLst/>
+          </a:prstGeom>
+          <a:ln>
+            <a:solidFill>
+              <a:schemeClr val="tx1"/>
+            </a:solidFill>
+          </a:ln>
+        </p:spPr>
+        <p:style>
+          <a:lnRef idx="2">
+            <a:schemeClr val="accent1"/>
+          </a:lnRef>
+          <a:fillRef idx="0">
+            <a:schemeClr val="accent1"/>
+          </a:fillRef>
+          <a:effectRef idx="1">
+            <a:schemeClr val="accent1"/>
+          </a:effectRef>
+          <a:fontRef idx="minor">
+            <a:schemeClr val="tx1"/>
+          </a:fontRef>
+        </p:style>
+      </p:cxnSp>
+      <p:sp>
+        <p:nvSpPr>
+          <p:cNvPr id="36" name="Ellipse 35">
+            <a:extLst>
+              <a:ext uri="{FF2B5EF4-FFF2-40B4-BE49-F238E27FC236}">
+                <a16:creationId xmlns:a16="http://schemas.microsoft.com/office/drawing/2014/main" id="{3000F53D-EB0B-1D23-C8FE-51D8DAA67A4F}"/>
+              </a:ext>
+            </a:extLst>
+          </p:cNvPr>
+          <p:cNvSpPr/>
+          <p:nvPr/>
+        </p:nvSpPr>
+        <p:spPr>
+          <a:xfrm>
+            <a:off x="5455920" y="2627375"/>
+            <a:ext cx="264160" cy="264160"/>
+          </a:xfrm>
+          <a:prstGeom prst="ellipse">
+            <a:avLst/>
+          </a:prstGeom>
+          <a:solidFill>
+            <a:srgbClr val="FFFF00"/>
+          </a:solidFill>
+          <a:ln>
+            <a:solidFill>
+              <a:srgbClr val="FFC000"/>
+            </a:solidFill>
+          </a:ln>
+        </p:spPr>
+        <p:style>
+          <a:lnRef idx="2">
+            <a:schemeClr val="accent1">
+              <a:shade val="15000"/>
+            </a:schemeClr>
+          </a:lnRef>
+          <a:fillRef idx="1">
+            <a:schemeClr val="accent1"/>
+          </a:fillRef>
+          <a:effectRef idx="0">
+            <a:schemeClr val="accent1"/>
+          </a:effectRef>
+          <a:fontRef idx="minor">
+            <a:schemeClr val="lt1"/>
+          </a:fontRef>
+        </p:style>
+        <p:txBody>
+          <a:bodyPr rtlCol="0" anchor="ctr"/>
+          <a:lstStyle/>
+          <a:p>
+            <a:pPr algn="ctr"/>
+            <a:r>
+              <a:rPr lang="fr-FR" sz="1200" b="1" dirty="0">
+                <a:solidFill>
+                  <a:sysClr val="windowText" lastClr="000000"/>
+                </a:solidFill>
+              </a:rPr>
+              <a:t>A</a:t>
+            </a:r>
+          </a:p>
+        </p:txBody>
+      </p:sp>
+      <p:sp>
+        <p:nvSpPr>
+          <p:cNvPr id="37" name="Ellipse 36">
+            <a:extLst>
+              <a:ext uri="{FF2B5EF4-FFF2-40B4-BE49-F238E27FC236}">
+                <a16:creationId xmlns:a16="http://schemas.microsoft.com/office/drawing/2014/main" id="{8C66B7B3-C958-9408-FA60-CFCBF96E246E}"/>
+              </a:ext>
+            </a:extLst>
+          </p:cNvPr>
+          <p:cNvSpPr/>
+          <p:nvPr/>
+        </p:nvSpPr>
+        <p:spPr>
+          <a:xfrm>
+            <a:off x="6024880" y="2627375"/>
+            <a:ext cx="264160" cy="264160"/>
+          </a:xfrm>
+          <a:prstGeom prst="ellipse">
+            <a:avLst/>
+          </a:prstGeom>
+          <a:solidFill>
+            <a:srgbClr val="FFBDBD"/>
+          </a:solidFill>
+          <a:ln>
+            <a:solidFill>
+              <a:srgbClr val="FF0000"/>
+            </a:solidFill>
+          </a:ln>
+        </p:spPr>
+        <p:style>
+          <a:lnRef idx="2">
+            <a:schemeClr val="accent1">
+              <a:shade val="15000"/>
+            </a:schemeClr>
+          </a:lnRef>
+          <a:fillRef idx="1">
+            <a:schemeClr val="accent1"/>
+          </a:fillRef>
+          <a:effectRef idx="0">
+            <a:schemeClr val="accent1"/>
+          </a:effectRef>
+          <a:fontRef idx="minor">
+            <a:schemeClr val="lt1"/>
+          </a:fontRef>
+        </p:style>
+        <p:txBody>
+          <a:bodyPr rtlCol="0" anchor="ctr"/>
+          <a:lstStyle/>
+          <a:p>
+            <a:pPr algn="ctr"/>
+            <a:r>
+              <a:rPr lang="fr-FR" sz="1200" b="1" dirty="0">
+                <a:solidFill>
+                  <a:sysClr val="windowText" lastClr="000000"/>
+                </a:solidFill>
+              </a:rPr>
+              <a:t>B</a:t>
+            </a:r>
+          </a:p>
+        </p:txBody>
+      </p:sp>
+      <p:cxnSp>
+        <p:nvCxnSpPr>
+          <p:cNvPr id="38" name="Connecteur droit 37">
+            <a:extLst>
+              <a:ext uri="{FF2B5EF4-FFF2-40B4-BE49-F238E27FC236}">
+                <a16:creationId xmlns:a16="http://schemas.microsoft.com/office/drawing/2014/main" id="{45A88CBE-71F7-7720-31D8-40E5F7811703}"/>
+              </a:ext>
+            </a:extLst>
+          </p:cNvPr>
+          <p:cNvCxnSpPr>
+            <a:stCxn id="36" idx="6"/>
+            <a:endCxn id="37" idx="2"/>
+          </p:cNvCxnSpPr>
+          <p:nvPr/>
+        </p:nvCxnSpPr>
+        <p:spPr>
+          <a:xfrm>
+            <a:off x="5720080" y="2759455"/>
+            <a:ext cx="304800" cy="0"/>
+          </a:xfrm>
+          <a:prstGeom prst="line">
+            <a:avLst/>
+          </a:prstGeom>
+          <a:ln>
+            <a:solidFill>
+              <a:schemeClr val="tx1"/>
+            </a:solidFill>
+          </a:ln>
+        </p:spPr>
+        <p:style>
+          <a:lnRef idx="2">
+            <a:schemeClr val="accent1"/>
+          </a:lnRef>
+          <a:fillRef idx="0">
+            <a:schemeClr val="accent1"/>
+          </a:fillRef>
+          <a:effectRef idx="1">
+            <a:schemeClr val="accent1"/>
+          </a:effectRef>
+          <a:fontRef idx="minor">
+            <a:schemeClr val="tx1"/>
+          </a:fontRef>
+        </p:style>
+      </p:cxnSp>
+      <p:sp>
+        <p:nvSpPr>
+          <p:cNvPr id="39" name="Ellipse 38">
+            <a:extLst>
+              <a:ext uri="{FF2B5EF4-FFF2-40B4-BE49-F238E27FC236}">
+                <a16:creationId xmlns:a16="http://schemas.microsoft.com/office/drawing/2014/main" id="{D9DFD9F9-80AC-9188-4C17-52DBD7870DA4}"/>
+              </a:ext>
+            </a:extLst>
+          </p:cNvPr>
+          <p:cNvSpPr/>
+          <p:nvPr/>
+        </p:nvSpPr>
+        <p:spPr>
+          <a:xfrm>
+            <a:off x="6024880" y="2089910"/>
+            <a:ext cx="264160" cy="264160"/>
+          </a:xfrm>
+          <a:prstGeom prst="ellipse">
+            <a:avLst/>
+          </a:prstGeom>
+          <a:solidFill>
+            <a:srgbClr val="FFFF00"/>
+          </a:solidFill>
+          <a:ln>
+            <a:solidFill>
+              <a:srgbClr val="FFC000"/>
+            </a:solidFill>
+          </a:ln>
+        </p:spPr>
+        <p:style>
+          <a:lnRef idx="2">
+            <a:schemeClr val="accent1">
+              <a:shade val="15000"/>
+            </a:schemeClr>
+          </a:lnRef>
+          <a:fillRef idx="1">
+            <a:schemeClr val="accent1"/>
+          </a:fillRef>
+          <a:effectRef idx="0">
+            <a:schemeClr val="accent1"/>
+          </a:effectRef>
+          <a:fontRef idx="minor">
+            <a:schemeClr val="lt1"/>
+          </a:fontRef>
+        </p:style>
+        <p:txBody>
+          <a:bodyPr rtlCol="0" anchor="ctr"/>
+          <a:lstStyle/>
+          <a:p>
+            <a:pPr algn="ctr"/>
+            <a:r>
+              <a:rPr lang="fr-FR" sz="1200" b="1" dirty="0">
+                <a:solidFill>
+                  <a:sysClr val="windowText" lastClr="000000"/>
+                </a:solidFill>
+              </a:rPr>
+              <a:t>C</a:t>
+            </a:r>
+          </a:p>
+        </p:txBody>
+      </p:sp>
+      <p:cxnSp>
+        <p:nvCxnSpPr>
+          <p:cNvPr id="40" name="Connecteur droit 39">
+            <a:extLst>
+              <a:ext uri="{FF2B5EF4-FFF2-40B4-BE49-F238E27FC236}">
+                <a16:creationId xmlns:a16="http://schemas.microsoft.com/office/drawing/2014/main" id="{56E82E1E-4FC8-89AB-BD90-7F7F2F4D5D25}"/>
+              </a:ext>
+            </a:extLst>
+          </p:cNvPr>
+          <p:cNvCxnSpPr>
+            <a:cxnSpLocks/>
+            <a:stCxn id="39" idx="4"/>
+            <a:endCxn id="37" idx="0"/>
+          </p:cNvCxnSpPr>
+          <p:nvPr/>
+        </p:nvCxnSpPr>
+        <p:spPr>
+          <a:xfrm>
+            <a:off x="6156960" y="2354070"/>
+            <a:ext cx="0" cy="273305"/>
+          </a:xfrm>
+          <a:prstGeom prst="line">
+            <a:avLst/>
+          </a:prstGeom>
+          <a:ln>
+            <a:solidFill>
+              <a:schemeClr val="tx1"/>
+            </a:solidFill>
+          </a:ln>
+        </p:spPr>
+        <p:style>
+          <a:lnRef idx="2">
+            <a:schemeClr val="accent1"/>
+          </a:lnRef>
+          <a:fillRef idx="0">
+            <a:schemeClr val="accent1"/>
+          </a:fillRef>
+          <a:effectRef idx="1">
+            <a:schemeClr val="accent1"/>
+          </a:effectRef>
+          <a:fontRef idx="minor">
+            <a:schemeClr val="tx1"/>
+          </a:fontRef>
+        </p:style>
+      </p:cxnSp>
+      <p:sp>
+        <p:nvSpPr>
+          <p:cNvPr id="41" name="Ellipse 40">
+            <a:extLst>
+              <a:ext uri="{FF2B5EF4-FFF2-40B4-BE49-F238E27FC236}">
+                <a16:creationId xmlns:a16="http://schemas.microsoft.com/office/drawing/2014/main" id="{E12F03AF-FBB5-E270-F2EB-FACB289A6A59}"/>
+              </a:ext>
+            </a:extLst>
+          </p:cNvPr>
+          <p:cNvSpPr/>
+          <p:nvPr/>
+        </p:nvSpPr>
+        <p:spPr>
+          <a:xfrm>
+            <a:off x="5455920" y="2089910"/>
+            <a:ext cx="264160" cy="264160"/>
+          </a:xfrm>
+          <a:prstGeom prst="ellipse">
+            <a:avLst/>
+          </a:prstGeom>
+          <a:solidFill>
+            <a:srgbClr val="FFBDBD"/>
+          </a:solidFill>
+          <a:ln>
+            <a:solidFill>
+              <a:srgbClr val="FF0000"/>
+            </a:solidFill>
+          </a:ln>
+        </p:spPr>
+        <p:style>
+          <a:lnRef idx="2">
+            <a:schemeClr val="accent1">
+              <a:shade val="15000"/>
+            </a:schemeClr>
+          </a:lnRef>
+          <a:fillRef idx="1">
+            <a:schemeClr val="accent1"/>
+          </a:fillRef>
+          <a:effectRef idx="0">
+            <a:schemeClr val="accent1"/>
+          </a:effectRef>
+          <a:fontRef idx="minor">
+            <a:schemeClr val="lt1"/>
+          </a:fontRef>
+        </p:style>
+        <p:txBody>
+          <a:bodyPr rtlCol="0" anchor="ctr"/>
+          <a:lstStyle/>
+          <a:p>
+            <a:pPr algn="ctr"/>
+            <a:r>
+              <a:rPr lang="fr-FR" sz="1200" b="1" dirty="0">
+                <a:solidFill>
+                  <a:sysClr val="windowText" lastClr="000000"/>
+                </a:solidFill>
+              </a:rPr>
+              <a:t>D</a:t>
+            </a:r>
+          </a:p>
+        </p:txBody>
+      </p:sp>
+      <p:cxnSp>
+        <p:nvCxnSpPr>
+          <p:cNvPr id="42" name="Connecteur droit 41">
+            <a:extLst>
+              <a:ext uri="{FF2B5EF4-FFF2-40B4-BE49-F238E27FC236}">
+                <a16:creationId xmlns:a16="http://schemas.microsoft.com/office/drawing/2014/main" id="{512A3086-6BF5-0C72-8BD4-B5FF4D782851}"/>
+              </a:ext>
+            </a:extLst>
+          </p:cNvPr>
+          <p:cNvCxnSpPr>
+            <a:cxnSpLocks/>
+            <a:stCxn id="41" idx="6"/>
+            <a:endCxn id="39" idx="2"/>
+          </p:cNvCxnSpPr>
+          <p:nvPr/>
+        </p:nvCxnSpPr>
+        <p:spPr>
+          <a:xfrm>
+            <a:off x="5720080" y="2221990"/>
+            <a:ext cx="304800" cy="0"/>
+          </a:xfrm>
+          <a:prstGeom prst="line">
+            <a:avLst/>
+          </a:prstGeom>
+          <a:ln>
+            <a:solidFill>
+              <a:schemeClr val="tx1"/>
+            </a:solidFill>
+          </a:ln>
+        </p:spPr>
+        <p:style>
+          <a:lnRef idx="2">
+            <a:schemeClr val="accent1"/>
+          </a:lnRef>
+          <a:fillRef idx="0">
+            <a:schemeClr val="accent1"/>
+          </a:fillRef>
+          <a:effectRef idx="1">
+            <a:schemeClr val="accent1"/>
+          </a:effectRef>
+          <a:fontRef idx="minor">
+            <a:schemeClr val="tx1"/>
+          </a:fontRef>
+        </p:style>
+      </p:cxnSp>
+      <p:cxnSp>
+        <p:nvCxnSpPr>
+          <p:cNvPr id="43" name="Connecteur droit 42">
+            <a:extLst>
+              <a:ext uri="{FF2B5EF4-FFF2-40B4-BE49-F238E27FC236}">
+                <a16:creationId xmlns:a16="http://schemas.microsoft.com/office/drawing/2014/main" id="{E9A59FB4-B99F-4944-5F6B-5237BD05FF07}"/>
+              </a:ext>
+            </a:extLst>
+          </p:cNvPr>
+          <p:cNvCxnSpPr>
+            <a:cxnSpLocks/>
+            <a:stCxn id="41" idx="4"/>
+            <a:endCxn id="36" idx="0"/>
+          </p:cNvCxnSpPr>
+          <p:nvPr/>
+        </p:nvCxnSpPr>
+        <p:spPr>
+          <a:xfrm>
+            <a:off x="5588000" y="2354070"/>
+            <a:ext cx="0" cy="273305"/>
+          </a:xfrm>
+          <a:prstGeom prst="line">
+            <a:avLst/>
+          </a:prstGeom>
+          <a:ln>
+            <a:solidFill>
+              <a:schemeClr val="tx1"/>
+            </a:solidFill>
+          </a:ln>
+        </p:spPr>
+        <p:style>
+          <a:lnRef idx="2">
+            <a:schemeClr val="accent1"/>
+          </a:lnRef>
+          <a:fillRef idx="0">
+            <a:schemeClr val="accent1"/>
+          </a:fillRef>
+          <a:effectRef idx="1">
+            <a:schemeClr val="accent1"/>
+          </a:effectRef>
+          <a:fontRef idx="minor">
+            <a:schemeClr val="tx1"/>
+          </a:fontRef>
+        </p:style>
+      </p:cxnSp>
+      <p:sp>
+        <p:nvSpPr>
+          <p:cNvPr id="44" name="Ellipse 43">
+            <a:extLst>
+              <a:ext uri="{FF2B5EF4-FFF2-40B4-BE49-F238E27FC236}">
+                <a16:creationId xmlns:a16="http://schemas.microsoft.com/office/drawing/2014/main" id="{6F45DFEC-98A7-5723-6C3F-4BA2C1729212}"/>
+              </a:ext>
+            </a:extLst>
+          </p:cNvPr>
+          <p:cNvSpPr/>
+          <p:nvPr/>
+        </p:nvSpPr>
+        <p:spPr>
+          <a:xfrm>
+            <a:off x="6024880" y="3164840"/>
+            <a:ext cx="264160" cy="264160"/>
+          </a:xfrm>
+          <a:prstGeom prst="ellipse">
+            <a:avLst/>
+          </a:prstGeom>
+          <a:solidFill>
+            <a:srgbClr val="FFFF00"/>
+          </a:solidFill>
+          <a:ln>
+            <a:solidFill>
+              <a:srgbClr val="FFC000"/>
+            </a:solidFill>
+          </a:ln>
+        </p:spPr>
+        <p:style>
+          <a:lnRef idx="2">
+            <a:schemeClr val="accent1">
+              <a:shade val="15000"/>
+            </a:schemeClr>
+          </a:lnRef>
+          <a:fillRef idx="1">
+            <a:schemeClr val="accent1"/>
+          </a:fillRef>
+          <a:effectRef idx="0">
+            <a:schemeClr val="accent1"/>
+          </a:effectRef>
+          <a:fontRef idx="minor">
+            <a:schemeClr val="lt1"/>
+          </a:fontRef>
+        </p:style>
+        <p:txBody>
+          <a:bodyPr rtlCol="0" anchor="ctr"/>
+          <a:lstStyle/>
+          <a:p>
+            <a:pPr algn="ctr"/>
+            <a:r>
+              <a:rPr lang="fr-FR" sz="1200" b="1" dirty="0">
+                <a:solidFill>
+                  <a:sysClr val="windowText" lastClr="000000"/>
+                </a:solidFill>
+              </a:rPr>
+              <a:t>E</a:t>
+            </a:r>
+          </a:p>
+        </p:txBody>
+      </p:sp>
+      <p:sp>
+        <p:nvSpPr>
+          <p:cNvPr id="45" name="Ellipse 44">
+            <a:extLst>
+              <a:ext uri="{FF2B5EF4-FFF2-40B4-BE49-F238E27FC236}">
+                <a16:creationId xmlns:a16="http://schemas.microsoft.com/office/drawing/2014/main" id="{13667986-EB0A-FDC7-8301-A188A57D732A}"/>
+              </a:ext>
+            </a:extLst>
+          </p:cNvPr>
+          <p:cNvSpPr/>
+          <p:nvPr/>
+        </p:nvSpPr>
+        <p:spPr>
+          <a:xfrm>
+            <a:off x="5455920" y="3164840"/>
+            <a:ext cx="264160" cy="264160"/>
+          </a:xfrm>
+          <a:prstGeom prst="ellipse">
+            <a:avLst/>
+          </a:prstGeom>
+          <a:solidFill>
+            <a:srgbClr val="FFBDBD"/>
+          </a:solidFill>
+          <a:ln>
+            <a:solidFill>
+              <a:srgbClr val="FF0000"/>
+            </a:solidFill>
+          </a:ln>
+        </p:spPr>
+        <p:style>
+          <a:lnRef idx="2">
+            <a:schemeClr val="accent1">
+              <a:shade val="15000"/>
+            </a:schemeClr>
+          </a:lnRef>
+          <a:fillRef idx="1">
+            <a:schemeClr val="accent1"/>
+          </a:fillRef>
+          <a:effectRef idx="0">
+            <a:schemeClr val="accent1"/>
+          </a:effectRef>
+          <a:fontRef idx="minor">
+            <a:schemeClr val="lt1"/>
+          </a:fontRef>
+        </p:style>
+        <p:txBody>
+          <a:bodyPr rtlCol="0" anchor="ctr"/>
+          <a:lstStyle/>
+          <a:p>
+            <a:pPr algn="ctr"/>
+            <a:r>
+              <a:rPr lang="fr-FR" sz="1200" b="1" dirty="0">
+                <a:solidFill>
+                  <a:sysClr val="windowText" lastClr="000000"/>
+                </a:solidFill>
+              </a:rPr>
+              <a:t>F</a:t>
+            </a:r>
+          </a:p>
+        </p:txBody>
+      </p:sp>
+      <p:cxnSp>
+        <p:nvCxnSpPr>
+          <p:cNvPr id="46" name="Connecteur droit 45">
+            <a:extLst>
+              <a:ext uri="{FF2B5EF4-FFF2-40B4-BE49-F238E27FC236}">
+                <a16:creationId xmlns:a16="http://schemas.microsoft.com/office/drawing/2014/main" id="{79AE3395-C926-696D-A805-C7EB0A660371}"/>
+              </a:ext>
+            </a:extLst>
+          </p:cNvPr>
+          <p:cNvCxnSpPr>
+            <a:cxnSpLocks/>
+            <a:stCxn id="45" idx="6"/>
+            <a:endCxn id="44" idx="2"/>
+          </p:cNvCxnSpPr>
+          <p:nvPr/>
+        </p:nvCxnSpPr>
+        <p:spPr>
+          <a:xfrm>
+            <a:off x="5720080" y="3296920"/>
+            <a:ext cx="304800" cy="0"/>
+          </a:xfrm>
+          <a:prstGeom prst="line">
+            <a:avLst/>
+          </a:prstGeom>
+          <a:ln>
+            <a:solidFill>
+              <a:schemeClr val="tx1"/>
+            </a:solidFill>
+          </a:ln>
+        </p:spPr>
+        <p:style>
+          <a:lnRef idx="2">
+            <a:schemeClr val="accent1"/>
+          </a:lnRef>
+          <a:fillRef idx="0">
+            <a:schemeClr val="accent1"/>
+          </a:fillRef>
+          <a:effectRef idx="1">
+            <a:schemeClr val="accent1"/>
+          </a:effectRef>
+          <a:fontRef idx="minor">
+            <a:schemeClr val="tx1"/>
+          </a:fontRef>
+        </p:style>
+      </p:cxnSp>
+      <p:cxnSp>
+        <p:nvCxnSpPr>
+          <p:cNvPr id="47" name="Connecteur droit 46">
+            <a:extLst>
+              <a:ext uri="{FF2B5EF4-FFF2-40B4-BE49-F238E27FC236}">
+                <a16:creationId xmlns:a16="http://schemas.microsoft.com/office/drawing/2014/main" id="{A0B0A8B5-5571-7942-014E-A3B50DD09488}"/>
+              </a:ext>
+            </a:extLst>
+          </p:cNvPr>
+          <p:cNvCxnSpPr>
+            <a:cxnSpLocks/>
+            <a:stCxn id="36" idx="4"/>
+            <a:endCxn id="45" idx="0"/>
+          </p:cNvCxnSpPr>
+          <p:nvPr/>
+        </p:nvCxnSpPr>
+        <p:spPr>
+          <a:xfrm>
+            <a:off x="5588000" y="2891535"/>
+            <a:ext cx="0" cy="273305"/>
+          </a:xfrm>
+          <a:prstGeom prst="line">
+            <a:avLst/>
+          </a:prstGeom>
+          <a:ln>
+            <a:solidFill>
+              <a:schemeClr val="tx1"/>
+            </a:solidFill>
+          </a:ln>
+        </p:spPr>
+        <p:style>
+          <a:lnRef idx="2">
+            <a:schemeClr val="accent1"/>
+          </a:lnRef>
+          <a:fillRef idx="0">
+            <a:schemeClr val="accent1"/>
+          </a:fillRef>
+          <a:effectRef idx="1">
+            <a:schemeClr val="accent1"/>
+          </a:effectRef>
+          <a:fontRef idx="minor">
+            <a:schemeClr val="tx1"/>
+          </a:fontRef>
+        </p:style>
+      </p:cxnSp>
+      <p:cxnSp>
+        <p:nvCxnSpPr>
+          <p:cNvPr id="48" name="Connecteur droit 47">
+            <a:extLst>
+              <a:ext uri="{FF2B5EF4-FFF2-40B4-BE49-F238E27FC236}">
+                <a16:creationId xmlns:a16="http://schemas.microsoft.com/office/drawing/2014/main" id="{1EE56B6E-A5A7-B155-B13C-57E0631F42C9}"/>
+              </a:ext>
+            </a:extLst>
+          </p:cNvPr>
+          <p:cNvCxnSpPr>
+            <a:cxnSpLocks/>
+            <a:stCxn id="37" idx="4"/>
+            <a:endCxn id="44" idx="0"/>
+          </p:cNvCxnSpPr>
+          <p:nvPr/>
+        </p:nvCxnSpPr>
+        <p:spPr>
+          <a:xfrm>
+            <a:off x="6156960" y="2891535"/>
+            <a:ext cx="0" cy="273305"/>
+          </a:xfrm>
+          <a:prstGeom prst="line">
+            <a:avLst/>
+          </a:prstGeom>
+          <a:ln>
+            <a:solidFill>
+              <a:schemeClr val="tx1"/>
+            </a:solidFill>
+          </a:ln>
+        </p:spPr>
+        <p:style>
+          <a:lnRef idx="2">
+            <a:schemeClr val="accent1"/>
+          </a:lnRef>
+          <a:fillRef idx="0">
+            <a:schemeClr val="accent1"/>
+          </a:fillRef>
+          <a:effectRef idx="1">
+            <a:schemeClr val="accent1"/>
+          </a:effectRef>
+          <a:fontRef idx="minor">
+            <a:schemeClr val="tx1"/>
+          </a:fontRef>
+        </p:style>
+      </p:cxnSp>
+      <p:sp>
+        <p:nvSpPr>
+          <p:cNvPr id="50" name="Rectangle 49">
+            <a:extLst>
+              <a:ext uri="{FF2B5EF4-FFF2-40B4-BE49-F238E27FC236}">
+                <a16:creationId xmlns:a16="http://schemas.microsoft.com/office/drawing/2014/main" id="{C12CFD4C-1647-C0B4-D62F-FC3E638F8C03}"/>
+              </a:ext>
+            </a:extLst>
+          </p:cNvPr>
+          <p:cNvSpPr/>
+          <p:nvPr/>
+        </p:nvSpPr>
+        <p:spPr>
+          <a:xfrm>
+            <a:off x="4328160" y="2495296"/>
+            <a:ext cx="167640" cy="167640"/>
+          </a:xfrm>
+          <a:prstGeom prst="rect">
+            <a:avLst/>
+          </a:prstGeom>
+          <a:noFill/>
+          <a:ln w="12700"/>
+        </p:spPr>
+        <p:style>
+          <a:lnRef idx="2">
+            <a:schemeClr val="accent1">
+              <a:shade val="15000"/>
+            </a:schemeClr>
+          </a:lnRef>
+          <a:fillRef idx="1">
+            <a:schemeClr val="accent1"/>
+          </a:fillRef>
+          <a:effectRef idx="0">
+            <a:schemeClr val="accent1"/>
+          </a:effectRef>
+          <a:fontRef idx="minor">
+            <a:schemeClr val="lt1"/>
+          </a:fontRef>
+        </p:style>
+        <p:txBody>
+          <a:bodyPr rtlCol="0" anchor="ctr"/>
+          <a:lstStyle/>
+          <a:p>
+            <a:pPr algn="ctr"/>
+            <a:r>
+              <a:rPr lang="fr-FR" sz="900" b="1" dirty="0">
+                <a:solidFill>
+                  <a:sysClr val="windowText" lastClr="000000"/>
+                </a:solidFill>
+              </a:rPr>
+              <a:t>0</a:t>
+            </a:r>
+          </a:p>
+        </p:txBody>
+      </p:sp>
+      <p:sp>
+        <p:nvSpPr>
+          <p:cNvPr id="51" name="Rectangle 50">
+            <a:extLst>
+              <a:ext uri="{FF2B5EF4-FFF2-40B4-BE49-F238E27FC236}">
+                <a16:creationId xmlns:a16="http://schemas.microsoft.com/office/drawing/2014/main" id="{5DFEA1DB-0293-C20D-F8BB-5BDA7705EEE5}"/>
+              </a:ext>
+            </a:extLst>
+          </p:cNvPr>
+          <p:cNvSpPr/>
+          <p:nvPr/>
+        </p:nvSpPr>
+        <p:spPr>
+          <a:xfrm>
+            <a:off x="5679440" y="2500376"/>
+            <a:ext cx="167640" cy="167640"/>
+          </a:xfrm>
+          <a:prstGeom prst="rect">
+            <a:avLst/>
+          </a:prstGeom>
+          <a:noFill/>
+          <a:ln w="12700"/>
+        </p:spPr>
+        <p:style>
+          <a:lnRef idx="2">
+            <a:schemeClr val="accent1">
+              <a:shade val="15000"/>
+            </a:schemeClr>
+          </a:lnRef>
+          <a:fillRef idx="1">
+            <a:schemeClr val="accent1"/>
+          </a:fillRef>
+          <a:effectRef idx="0">
+            <a:schemeClr val="accent1"/>
+          </a:effectRef>
+          <a:fontRef idx="minor">
+            <a:schemeClr val="lt1"/>
+          </a:fontRef>
+        </p:style>
+        <p:txBody>
+          <a:bodyPr rtlCol="0" anchor="ctr"/>
+          <a:lstStyle/>
+          <a:p>
+            <a:pPr algn="ctr"/>
+            <a:r>
+              <a:rPr lang="fr-FR" sz="900" b="1" dirty="0">
+                <a:solidFill>
+                  <a:sysClr val="windowText" lastClr="000000"/>
+                </a:solidFill>
+              </a:rPr>
+              <a:t>0</a:t>
+            </a:r>
+          </a:p>
+        </p:txBody>
+      </p:sp>
+      <p:sp>
+        <p:nvSpPr>
+          <p:cNvPr id="52" name="Rectangle 51">
+            <a:extLst>
+              <a:ext uri="{FF2B5EF4-FFF2-40B4-BE49-F238E27FC236}">
+                <a16:creationId xmlns:a16="http://schemas.microsoft.com/office/drawing/2014/main" id="{0C2845CF-7D18-1063-F641-692AD8BA2D64}"/>
+              </a:ext>
+            </a:extLst>
+          </p:cNvPr>
+          <p:cNvSpPr/>
+          <p:nvPr/>
+        </p:nvSpPr>
+        <p:spPr>
+          <a:xfrm>
+            <a:off x="4907280" y="2500376"/>
+            <a:ext cx="167640" cy="167640"/>
+          </a:xfrm>
+          <a:prstGeom prst="rect">
+            <a:avLst/>
+          </a:prstGeom>
+          <a:noFill/>
+          <a:ln w="12700"/>
+        </p:spPr>
+        <p:style>
+          <a:lnRef idx="2">
+            <a:schemeClr val="accent1">
+              <a:shade val="15000"/>
+            </a:schemeClr>
+          </a:lnRef>
+          <a:fillRef idx="1">
+            <a:schemeClr val="accent1"/>
+          </a:fillRef>
+          <a:effectRef idx="0">
+            <a:schemeClr val="accent1"/>
+          </a:effectRef>
+          <a:fontRef idx="minor">
+            <a:schemeClr val="lt1"/>
+          </a:fontRef>
+        </p:style>
+        <p:txBody>
+          <a:bodyPr rtlCol="0" anchor="ctr"/>
+          <a:lstStyle/>
+          <a:p>
+            <a:pPr algn="ctr"/>
+            <a:r>
+              <a:rPr lang="fr-FR" sz="900" b="1" dirty="0">
+                <a:solidFill>
+                  <a:sysClr val="windowText" lastClr="000000"/>
+                </a:solidFill>
+              </a:rPr>
+              <a:t>1</a:t>
+            </a:r>
+          </a:p>
+        </p:txBody>
+      </p:sp>
+      <p:sp>
+        <p:nvSpPr>
+          <p:cNvPr id="53" name="Rectangle 52">
+            <a:extLst>
+              <a:ext uri="{FF2B5EF4-FFF2-40B4-BE49-F238E27FC236}">
+                <a16:creationId xmlns:a16="http://schemas.microsoft.com/office/drawing/2014/main" id="{3F5BBE1E-2F4B-B31C-BFFF-AADAF40239C3}"/>
+              </a:ext>
+            </a:extLst>
+          </p:cNvPr>
+          <p:cNvSpPr/>
+          <p:nvPr/>
+        </p:nvSpPr>
+        <p:spPr>
+          <a:xfrm>
+            <a:off x="6248399" y="2495296"/>
+            <a:ext cx="167640" cy="167640"/>
+          </a:xfrm>
+          <a:prstGeom prst="rect">
+            <a:avLst/>
+          </a:prstGeom>
+          <a:noFill/>
+          <a:ln w="12700"/>
+        </p:spPr>
+        <p:style>
+          <a:lnRef idx="2">
+            <a:schemeClr val="accent1">
+              <a:shade val="15000"/>
+            </a:schemeClr>
+          </a:lnRef>
+          <a:fillRef idx="1">
+            <a:schemeClr val="accent1"/>
+          </a:fillRef>
+          <a:effectRef idx="0">
+            <a:schemeClr val="accent1"/>
+          </a:effectRef>
+          <a:fontRef idx="minor">
+            <a:schemeClr val="lt1"/>
+          </a:fontRef>
+        </p:style>
+        <p:txBody>
+          <a:bodyPr rtlCol="0" anchor="ctr"/>
+          <a:lstStyle/>
+          <a:p>
+            <a:pPr algn="ctr"/>
+            <a:r>
+              <a:rPr lang="fr-FR" sz="900" b="1" dirty="0">
+                <a:solidFill>
+                  <a:sysClr val="windowText" lastClr="000000"/>
+                </a:solidFill>
+              </a:rPr>
+              <a:t>1</a:t>
+            </a:r>
+          </a:p>
+        </p:txBody>
+      </p:sp>
+      <p:sp>
+        <p:nvSpPr>
+          <p:cNvPr id="54" name="Rectangle 53">
+            <a:extLst>
+              <a:ext uri="{FF2B5EF4-FFF2-40B4-BE49-F238E27FC236}">
+                <a16:creationId xmlns:a16="http://schemas.microsoft.com/office/drawing/2014/main" id="{DDD9450C-5E29-12FC-FCC2-9027F32CA554}"/>
+              </a:ext>
+            </a:extLst>
+          </p:cNvPr>
+          <p:cNvSpPr/>
+          <p:nvPr/>
+        </p:nvSpPr>
+        <p:spPr>
+          <a:xfrm>
+            <a:off x="4319269" y="1948684"/>
+            <a:ext cx="167640" cy="167640"/>
+          </a:xfrm>
+          <a:prstGeom prst="rect">
+            <a:avLst/>
+          </a:prstGeom>
+          <a:noFill/>
+          <a:ln w="12700"/>
+        </p:spPr>
+        <p:style>
+          <a:lnRef idx="2">
+            <a:schemeClr val="accent1">
+              <a:shade val="15000"/>
+            </a:schemeClr>
+          </a:lnRef>
+          <a:fillRef idx="1">
+            <a:schemeClr val="accent1"/>
+          </a:fillRef>
+          <a:effectRef idx="0">
+            <a:schemeClr val="accent1"/>
+          </a:effectRef>
+          <a:fontRef idx="minor">
+            <a:schemeClr val="lt1"/>
+          </a:fontRef>
+        </p:style>
+        <p:txBody>
+          <a:bodyPr rtlCol="0" anchor="ctr"/>
+          <a:lstStyle/>
+          <a:p>
+            <a:pPr algn="ctr"/>
+            <a:r>
+              <a:rPr lang="fr-FR" sz="900" b="1" dirty="0">
+                <a:solidFill>
+                  <a:sysClr val="windowText" lastClr="000000"/>
+                </a:solidFill>
+              </a:rPr>
+              <a:t>3</a:t>
+            </a:r>
+          </a:p>
+        </p:txBody>
+      </p:sp>
+      <p:sp>
+        <p:nvSpPr>
+          <p:cNvPr id="55" name="Rectangle 54">
+            <a:extLst>
+              <a:ext uri="{FF2B5EF4-FFF2-40B4-BE49-F238E27FC236}">
+                <a16:creationId xmlns:a16="http://schemas.microsoft.com/office/drawing/2014/main" id="{1C2913F6-C35F-BD20-A19E-24B8FA873EAA}"/>
+              </a:ext>
+            </a:extLst>
+          </p:cNvPr>
+          <p:cNvSpPr/>
+          <p:nvPr/>
+        </p:nvSpPr>
+        <p:spPr>
+          <a:xfrm>
+            <a:off x="6235698" y="1964432"/>
+            <a:ext cx="167640" cy="167640"/>
+          </a:xfrm>
+          <a:prstGeom prst="rect">
+            <a:avLst/>
+          </a:prstGeom>
+          <a:noFill/>
+          <a:ln w="12700"/>
+        </p:spPr>
+        <p:style>
+          <a:lnRef idx="2">
+            <a:schemeClr val="accent1">
+              <a:shade val="15000"/>
+            </a:schemeClr>
+          </a:lnRef>
+          <a:fillRef idx="1">
+            <a:schemeClr val="accent1"/>
+          </a:fillRef>
+          <a:effectRef idx="0">
+            <a:schemeClr val="accent1"/>
+          </a:effectRef>
+          <a:fontRef idx="minor">
+            <a:schemeClr val="lt1"/>
+          </a:fontRef>
+        </p:style>
+        <p:txBody>
+          <a:bodyPr rtlCol="0" anchor="ctr"/>
+          <a:lstStyle/>
+          <a:p>
+            <a:pPr algn="ctr"/>
+            <a:r>
+              <a:rPr lang="fr-FR" sz="900" b="1" dirty="0">
+                <a:solidFill>
+                  <a:sysClr val="windowText" lastClr="000000"/>
+                </a:solidFill>
+              </a:rPr>
+              <a:t>0</a:t>
+            </a:r>
+          </a:p>
+        </p:txBody>
+      </p:sp>
+      <p:sp>
+        <p:nvSpPr>
+          <p:cNvPr id="57" name="Rectangle 56">
+            <a:extLst>
+              <a:ext uri="{FF2B5EF4-FFF2-40B4-BE49-F238E27FC236}">
+                <a16:creationId xmlns:a16="http://schemas.microsoft.com/office/drawing/2014/main" id="{5A1FAE7A-ADED-54B1-51F7-FCCBE7447633}"/>
+              </a:ext>
+            </a:extLst>
+          </p:cNvPr>
+          <p:cNvSpPr/>
+          <p:nvPr/>
+        </p:nvSpPr>
+        <p:spPr>
+          <a:xfrm>
+            <a:off x="6228080" y="3011933"/>
+            <a:ext cx="167640" cy="167640"/>
+          </a:xfrm>
+          <a:prstGeom prst="rect">
+            <a:avLst/>
+          </a:prstGeom>
+          <a:noFill/>
+          <a:ln w="12700"/>
+        </p:spPr>
+        <p:style>
+          <a:lnRef idx="2">
+            <a:schemeClr val="accent1">
+              <a:shade val="15000"/>
+            </a:schemeClr>
+          </a:lnRef>
+          <a:fillRef idx="1">
+            <a:schemeClr val="accent1"/>
+          </a:fillRef>
+          <a:effectRef idx="0">
+            <a:schemeClr val="accent1"/>
+          </a:effectRef>
+          <a:fontRef idx="minor">
+            <a:schemeClr val="lt1"/>
+          </a:fontRef>
+        </p:style>
+        <p:txBody>
+          <a:bodyPr rtlCol="0" anchor="ctr"/>
+          <a:lstStyle/>
+          <a:p>
+            <a:pPr algn="ctr"/>
+            <a:r>
+              <a:rPr lang="fr-FR" sz="900" b="1" dirty="0">
+                <a:solidFill>
+                  <a:sysClr val="windowText" lastClr="000000"/>
+                </a:solidFill>
+              </a:rPr>
+              <a:t>0</a:t>
+            </a:r>
+          </a:p>
+        </p:txBody>
+      </p:sp>
+      <p:sp>
+        <p:nvSpPr>
+          <p:cNvPr id="58" name="Rectangle 57">
+            <a:extLst>
+              <a:ext uri="{FF2B5EF4-FFF2-40B4-BE49-F238E27FC236}">
+                <a16:creationId xmlns:a16="http://schemas.microsoft.com/office/drawing/2014/main" id="{47AD3980-5B39-40DF-0DBE-10427FF8DCE8}"/>
+              </a:ext>
+            </a:extLst>
+          </p:cNvPr>
+          <p:cNvSpPr/>
+          <p:nvPr/>
+        </p:nvSpPr>
+        <p:spPr>
+          <a:xfrm>
+            <a:off x="4918709" y="1987292"/>
+            <a:ext cx="167640" cy="167640"/>
+          </a:xfrm>
+          <a:prstGeom prst="rect">
+            <a:avLst/>
+          </a:prstGeom>
+          <a:noFill/>
+          <a:ln w="12700"/>
+        </p:spPr>
+        <p:style>
+          <a:lnRef idx="2">
+            <a:schemeClr val="accent1">
+              <a:shade val="15000"/>
+            </a:schemeClr>
+          </a:lnRef>
+          <a:fillRef idx="1">
+            <a:schemeClr val="accent1"/>
+          </a:fillRef>
+          <a:effectRef idx="0">
+            <a:schemeClr val="accent1"/>
+          </a:effectRef>
+          <a:fontRef idx="minor">
+            <a:schemeClr val="lt1"/>
+          </a:fontRef>
+        </p:style>
+        <p:txBody>
+          <a:bodyPr rtlCol="0" anchor="ctr"/>
+          <a:lstStyle/>
+          <a:p>
+            <a:pPr algn="ctr"/>
+            <a:r>
+              <a:rPr lang="fr-FR" sz="900" b="1" dirty="0">
+                <a:solidFill>
+                  <a:sysClr val="windowText" lastClr="000000"/>
+                </a:solidFill>
+              </a:rPr>
+              <a:t>2</a:t>
+            </a:r>
+          </a:p>
+        </p:txBody>
+      </p:sp>
+      <p:sp>
+        <p:nvSpPr>
+          <p:cNvPr id="60" name="Rectangle 59">
+            <a:extLst>
+              <a:ext uri="{FF2B5EF4-FFF2-40B4-BE49-F238E27FC236}">
+                <a16:creationId xmlns:a16="http://schemas.microsoft.com/office/drawing/2014/main" id="{6D33F64E-5E23-304C-1051-F421FC5CF082}"/>
+              </a:ext>
+            </a:extLst>
+          </p:cNvPr>
+          <p:cNvSpPr/>
+          <p:nvPr/>
+        </p:nvSpPr>
+        <p:spPr>
+          <a:xfrm>
+            <a:off x="5679440" y="1957831"/>
+            <a:ext cx="167640" cy="167640"/>
+          </a:xfrm>
+          <a:prstGeom prst="rect">
+            <a:avLst/>
+          </a:prstGeom>
+          <a:noFill/>
+          <a:ln w="12700"/>
+        </p:spPr>
+        <p:style>
+          <a:lnRef idx="2">
+            <a:schemeClr val="accent1">
+              <a:shade val="15000"/>
+            </a:schemeClr>
+          </a:lnRef>
+          <a:fillRef idx="1">
+            <a:schemeClr val="accent1"/>
+          </a:fillRef>
+          <a:effectRef idx="0">
+            <a:schemeClr val="accent1"/>
+          </a:effectRef>
+          <a:fontRef idx="minor">
+            <a:schemeClr val="lt1"/>
+          </a:fontRef>
+        </p:style>
+        <p:txBody>
+          <a:bodyPr rtlCol="0" anchor="ctr"/>
+          <a:lstStyle/>
+          <a:p>
+            <a:pPr algn="ctr"/>
+            <a:r>
+              <a:rPr lang="fr-FR" sz="900" b="1" dirty="0">
+                <a:solidFill>
+                  <a:sysClr val="windowText" lastClr="000000"/>
+                </a:solidFill>
+              </a:rPr>
+              <a:t>1</a:t>
+            </a:r>
+          </a:p>
+        </p:txBody>
+      </p:sp>
+      <p:sp>
+        <p:nvSpPr>
+          <p:cNvPr id="61" name="Rectangle 60">
+            <a:extLst>
+              <a:ext uri="{FF2B5EF4-FFF2-40B4-BE49-F238E27FC236}">
+                <a16:creationId xmlns:a16="http://schemas.microsoft.com/office/drawing/2014/main" id="{CFFEBEA5-65EC-F1CD-AAE9-9216DBAA8E08}"/>
+              </a:ext>
+            </a:extLst>
+          </p:cNvPr>
+          <p:cNvSpPr/>
+          <p:nvPr/>
+        </p:nvSpPr>
+        <p:spPr>
+          <a:xfrm>
+            <a:off x="5687059" y="3054097"/>
+            <a:ext cx="167640" cy="167640"/>
+          </a:xfrm>
+          <a:prstGeom prst="rect">
+            <a:avLst/>
+          </a:prstGeom>
+          <a:noFill/>
+          <a:ln w="12700"/>
+        </p:spPr>
+        <p:style>
+          <a:lnRef idx="2">
+            <a:schemeClr val="accent1">
+              <a:shade val="15000"/>
+            </a:schemeClr>
+          </a:lnRef>
+          <a:fillRef idx="1">
+            <a:schemeClr val="accent1"/>
+          </a:fillRef>
+          <a:effectRef idx="0">
+            <a:schemeClr val="accent1"/>
+          </a:effectRef>
+          <a:fontRef idx="minor">
+            <a:schemeClr val="lt1"/>
+          </a:fontRef>
+        </p:style>
+        <p:txBody>
+          <a:bodyPr rtlCol="0" anchor="ctr"/>
+          <a:lstStyle/>
+          <a:p>
+            <a:pPr algn="ctr"/>
+            <a:r>
+              <a:rPr lang="fr-FR" sz="900" b="1" dirty="0">
+                <a:solidFill>
+                  <a:sysClr val="windowText" lastClr="000000"/>
+                </a:solidFill>
+              </a:rPr>
+              <a:t>1</a:t>
+            </a:r>
+          </a:p>
+        </p:txBody>
+      </p:sp>
+      <p:sp>
+        <p:nvSpPr>
+          <p:cNvPr id="62" name="Rectangle 61">
+            <a:extLst>
+              <a:ext uri="{FF2B5EF4-FFF2-40B4-BE49-F238E27FC236}">
+                <a16:creationId xmlns:a16="http://schemas.microsoft.com/office/drawing/2014/main" id="{AFFC9ACC-3AFF-00C2-3779-85501AF82F6E}"/>
+              </a:ext>
+            </a:extLst>
+          </p:cNvPr>
+          <p:cNvSpPr/>
+          <p:nvPr/>
+        </p:nvSpPr>
+        <p:spPr>
+          <a:xfrm>
+            <a:off x="4914899" y="3054097"/>
+            <a:ext cx="167640" cy="167640"/>
+          </a:xfrm>
+          <a:prstGeom prst="rect">
+            <a:avLst/>
+          </a:prstGeom>
+          <a:noFill/>
+          <a:ln w="12700"/>
+        </p:spPr>
+        <p:style>
+          <a:lnRef idx="2">
+            <a:schemeClr val="accent1">
+              <a:shade val="15000"/>
+            </a:schemeClr>
+          </a:lnRef>
+          <a:fillRef idx="1">
+            <a:schemeClr val="accent1"/>
+          </a:fillRef>
+          <a:effectRef idx="0">
+            <a:schemeClr val="accent1"/>
+          </a:effectRef>
+          <a:fontRef idx="minor">
+            <a:schemeClr val="lt1"/>
+          </a:fontRef>
+        </p:style>
+        <p:txBody>
+          <a:bodyPr rtlCol="0" anchor="ctr"/>
+          <a:lstStyle/>
+          <a:p>
+            <a:pPr algn="ctr"/>
+            <a:r>
+              <a:rPr lang="fr-FR" sz="900" b="1" dirty="0">
+                <a:solidFill>
+                  <a:sysClr val="windowText" lastClr="000000"/>
+                </a:solidFill>
+              </a:rPr>
+              <a:t>4</a:t>
+            </a:r>
+          </a:p>
+        </p:txBody>
+      </p:sp>
+      <p:sp>
+        <p:nvSpPr>
+          <p:cNvPr id="63" name="Rectangle 62">
+            <a:extLst>
+              <a:ext uri="{FF2B5EF4-FFF2-40B4-BE49-F238E27FC236}">
+                <a16:creationId xmlns:a16="http://schemas.microsoft.com/office/drawing/2014/main" id="{AAFD0001-64D8-CAAC-4B34-06781BDC9706}"/>
+              </a:ext>
+            </a:extLst>
+          </p:cNvPr>
+          <p:cNvSpPr/>
+          <p:nvPr/>
+        </p:nvSpPr>
+        <p:spPr>
+          <a:xfrm>
+            <a:off x="4343399" y="3054097"/>
+            <a:ext cx="167640" cy="167640"/>
+          </a:xfrm>
+          <a:prstGeom prst="rect">
+            <a:avLst/>
+          </a:prstGeom>
+          <a:noFill/>
+          <a:ln w="12700"/>
+        </p:spPr>
+        <p:style>
+          <a:lnRef idx="2">
+            <a:schemeClr val="accent1">
+              <a:shade val="15000"/>
+            </a:schemeClr>
+          </a:lnRef>
+          <a:fillRef idx="1">
+            <a:schemeClr val="accent1"/>
+          </a:fillRef>
+          <a:effectRef idx="0">
+            <a:schemeClr val="accent1"/>
+          </a:effectRef>
+          <a:fontRef idx="minor">
+            <a:schemeClr val="lt1"/>
+          </a:fontRef>
+        </p:style>
+        <p:txBody>
+          <a:bodyPr rtlCol="0" anchor="ctr"/>
+          <a:lstStyle/>
+          <a:p>
+            <a:pPr algn="ctr"/>
+            <a:r>
+              <a:rPr lang="fr-FR" sz="900" b="1" dirty="0">
+                <a:solidFill>
+                  <a:sysClr val="windowText" lastClr="000000"/>
+                </a:solidFill>
+              </a:rPr>
+              <a:t>5</a:t>
+            </a:r>
+          </a:p>
+        </p:txBody>
+      </p:sp>
+    </p:spTree>
+    <p:extLst>
+      <p:ext uri="{BB962C8B-B14F-4D97-AF65-F5344CB8AC3E}">
+        <p14:creationId xmlns:p14="http://schemas.microsoft.com/office/powerpoint/2010/main" val="261603655"/>
+      </p:ext>
+    </p:extLst>
+  </p:cSld>
+  <p:clrMapOvr>
+    <a:masterClrMapping/>
+  </p:clrMapOvr>
+</p:sld>
+</file>
+
 <file path=ppt/theme/theme1.xml><?xml version="1.0" encoding="utf-8"?>
 <a:theme xmlns:a="http://schemas.openxmlformats.org/drawingml/2006/main" name="Thème Office">
   <a:themeElements>
